--- a/examples/ppt/charts/charts-line.pptx
+++ b/examples/ppt/charts/charts-line.pptx
@@ -5,14 +5,14 @@
     <p:sldMasterId xmlns:r="http://schemas.openxmlformats.org/officeDocument/2006/relationships" id="2147483648" r:id="rId1"/>
   </p:sldMasterIdLst>
   <p:sldIdLst>
-    <p:sldId id="256" r:id="Re2f8c8935a7e407d"/>
-    <p:sldId id="257" r:id="Rdd5c4cf2bd064083"/>
-    <p:sldId id="258" r:id="R6b7e6672e3f94422"/>
-    <p:sldId id="259" r:id="R5057c15b60654bc8"/>
-    <p:sldId id="260" r:id="Rbb7bb630fa314efb"/>
-    <p:sldId id="261" r:id="Rfe28012455aa4c0c"/>
-    <p:sldId id="262" r:id="Rd15630cfdd434b88"/>
-    <p:sldId id="263" r:id="R27d337e21ff24707"/>
+    <p:sldId id="256" r:id="R4c6ea206132f4cad"/>
+    <p:sldId id="257" r:id="Rf090a809f1594031"/>
+    <p:sldId id="258" r:id="Ra6f6cfdf40a54b7b"/>
+    <p:sldId id="259" r:id="R50c9c28bc3ee44d0"/>
+    <p:sldId id="260" r:id="Re4ba3ec1caa247d2"/>
+    <p:sldId id="261" r:id="R39cdfc3fc39045fd"/>
+    <p:sldId id="262" r:id="R8f708416f8554d01"/>
+    <p:sldId id="263" r:id="R4b0d140a80c24636"/>
   </p:sldIdLst>
   <p:sldSz cx="12192000" cy="6858000"/>
   <p:notesSz cx="6858000" cy="9144000"/>
@@ -287,7 +287,7 @@
 </file>
 
 <file path=ppt/slideMasters/slideMaster1.xml><?xml version="1.0" encoding="utf-8"?>
-<p:sldMaster xmlns:p="http://schemas.openxmlformats.org/presentationml/2006/main">
+<p:sldMaster xmlns:r="http://schemas.openxmlformats.org/officeDocument/2006/relationships" xmlns:p="http://schemas.openxmlformats.org/presentationml/2006/main">
   <p:cSld>
     <p:spTree>
       <p:nvGrpSpPr>
@@ -342,9 +342,11 @@
             <c:v>A</c:v>
           </c:tx>
           <c:spPr>
-            <a:solidFill xmlns:a="http://schemas.openxmlformats.org/drawingml/2006/main">
-              <a:srgbClr val="4472C4"/>
-            </a:solidFill>
+            <a:ln xmlns:a="http://schemas.openxmlformats.org/drawingml/2006/main" w="25400">
+              <a:solidFill>
+                <a:srgbClr val="4472C4"/>
+              </a:solidFill>
+            </a:ln>
           </c:spPr>
           <c:cat>
             <c:strLit>
@@ -395,9 +397,11 @@
             <c:v>B</c:v>
           </c:tx>
           <c:spPr>
-            <a:solidFill xmlns:a="http://schemas.openxmlformats.org/drawingml/2006/main">
-              <a:srgbClr val="ED7D31"/>
-            </a:solidFill>
+            <a:ln xmlns:a="http://schemas.openxmlformats.org/drawingml/2006/main" w="25400">
+              <a:solidFill>
+                <a:srgbClr val="ED7D31"/>
+              </a:solidFill>
+            </a:ln>
           </c:spPr>
           <c:cat>
             <c:strLit>
@@ -441,7 +445,6 @@
             </c:numLit>
           </c:val>
         </c:ser>
-        <c:marker val="1"/>
         <c:axId val="1"/>
         <c:axId val="2"/>
       </c:lineChart>
@@ -521,10 +524,10 @@
             <c:v>A</c:v>
           </c:tx>
           <c:spPr>
-            <a:solidFill xmlns:a="http://schemas.openxmlformats.org/drawingml/2006/main">
-              <a:srgbClr val="4472C4"/>
-            </a:solidFill>
             <a:ln xmlns:a="http://schemas.openxmlformats.org/drawingml/2006/main" w="25400">
+              <a:solidFill>
+                <a:srgbClr val="4472C4"/>
+              </a:solidFill>
               <a:prstDash val="sysDash"/>
             </a:ln>
           </c:spPr>
@@ -570,7 +573,6 @@
             </c:numLit>
           </c:val>
         </c:ser>
-        <c:marker val="1"/>
         <c:axId val="1"/>
         <c:axId val="2"/>
       </c:lineChart>
@@ -646,10 +648,10 @@
             <c:v>A</c:v>
           </c:tx>
           <c:spPr>
-            <a:solidFill xmlns:a="http://schemas.openxmlformats.org/drawingml/2006/main">
-              <a:srgbClr val="4472C4"/>
-            </a:solidFill>
             <a:ln xmlns:a="http://schemas.openxmlformats.org/drawingml/2006/main" w="25400">
+              <a:solidFill>
+                <a:srgbClr val="4472C4"/>
+              </a:solidFill>
               <a:prstDash val="sysDot"/>
             </a:ln>
           </c:spPr>
@@ -695,7 +697,6 @@
             </c:numLit>
           </c:val>
         </c:ser>
-        <c:marker val="1"/>
         <c:axId val="1"/>
         <c:axId val="2"/>
       </c:lineChart>
@@ -771,10 +772,10 @@
             <c:v>A</c:v>
           </c:tx>
           <c:spPr>
-            <a:solidFill xmlns:a="http://schemas.openxmlformats.org/drawingml/2006/main">
-              <a:srgbClr val="4472C4"/>
-            </a:solidFill>
             <a:ln xmlns:a="http://schemas.openxmlformats.org/drawingml/2006/main" w="25400">
+              <a:solidFill>
+                <a:srgbClr val="4472C4"/>
+              </a:solidFill>
               <a:prstDash val="sysDashDot"/>
             </a:ln>
           </c:spPr>
@@ -820,7 +821,6 @@
             </c:numLit>
           </c:val>
         </c:ser>
-        <c:marker val="1"/>
         <c:axId val="1"/>
         <c:axId val="2"/>
       </c:lineChart>
@@ -902,9 +902,11 @@
             <c:v>A</c:v>
           </c:tx>
           <c:spPr>
-            <a:solidFill xmlns:a="http://schemas.openxmlformats.org/drawingml/2006/main">
-              <a:srgbClr val="4472C4"/>
-            </a:solidFill>
+            <a:ln xmlns:a="http://schemas.openxmlformats.org/drawingml/2006/main" w="25400">
+              <a:solidFill>
+                <a:srgbClr val="4472C4"/>
+              </a:solidFill>
+            </a:ln>
           </c:spPr>
           <c:cat>
             <c:strLit>
@@ -955,9 +957,11 @@
             <c:v>B</c:v>
           </c:tx>
           <c:spPr>
-            <a:solidFill xmlns:a="http://schemas.openxmlformats.org/drawingml/2006/main">
-              <a:srgbClr val="ED7D31"/>
-            </a:solidFill>
+            <a:ln xmlns:a="http://schemas.openxmlformats.org/drawingml/2006/main" w="25400">
+              <a:solidFill>
+                <a:srgbClr val="ED7D31"/>
+              </a:solidFill>
+            </a:ln>
           </c:spPr>
           <c:cat>
             <c:strLit>
@@ -1001,7 +1005,6 @@
             </c:numLit>
           </c:val>
         </c:ser>
-        <c:marker val="1"/>
         <c:axId val="1"/>
         <c:axId val="2"/>
       </c:lineChart>
@@ -1081,9 +1084,11 @@
             <c:v>A</c:v>
           </c:tx>
           <c:spPr>
-            <a:solidFill xmlns:a="http://schemas.openxmlformats.org/drawingml/2006/main">
-              <a:srgbClr val="4472C4"/>
-            </a:solidFill>
+            <a:ln xmlns:a="http://schemas.openxmlformats.org/drawingml/2006/main" w="25400">
+              <a:solidFill>
+                <a:srgbClr val="4472C4"/>
+              </a:solidFill>
+            </a:ln>
           </c:spPr>
           <c:cat>
             <c:strLit>
@@ -1134,9 +1139,11 @@
             <c:v>B</c:v>
           </c:tx>
           <c:spPr>
-            <a:solidFill xmlns:a="http://schemas.openxmlformats.org/drawingml/2006/main">
-              <a:srgbClr val="ED7D31"/>
-            </a:solidFill>
+            <a:ln xmlns:a="http://schemas.openxmlformats.org/drawingml/2006/main" w="25400">
+              <a:solidFill>
+                <a:srgbClr val="ED7D31"/>
+              </a:solidFill>
+            </a:ln>
           </c:spPr>
           <c:cat>
             <c:strLit>
@@ -1180,7 +1187,6 @@
             </c:numLit>
           </c:val>
         </c:ser>
-        <c:marker val="1"/>
         <c:axId val="1"/>
         <c:axId val="2"/>
       </c:lineChart>
@@ -1275,9 +1281,11 @@
             <c:v>A</c:v>
           </c:tx>
           <c:spPr>
-            <a:solidFill xmlns:a="http://schemas.openxmlformats.org/drawingml/2006/main">
-              <a:srgbClr val="4472C4"/>
-            </a:solidFill>
+            <a:ln xmlns:a="http://schemas.openxmlformats.org/drawingml/2006/main" w="25400">
+              <a:solidFill>
+                <a:srgbClr val="4472C4"/>
+              </a:solidFill>
+            </a:ln>
           </c:spPr>
           <c:cat>
             <c:strLit>
@@ -1328,9 +1336,11 @@
             <c:v>B</c:v>
           </c:tx>
           <c:spPr>
-            <a:solidFill xmlns:a="http://schemas.openxmlformats.org/drawingml/2006/main">
-              <a:srgbClr val="ED7D31"/>
-            </a:solidFill>
+            <a:ln xmlns:a="http://schemas.openxmlformats.org/drawingml/2006/main" w="25400">
+              <a:solidFill>
+                <a:srgbClr val="ED7D31"/>
+              </a:solidFill>
+            </a:ln>
           </c:spPr>
           <c:cat>
             <c:strLit>
@@ -1374,7 +1384,6 @@
             </c:numLit>
           </c:val>
         </c:ser>
-        <c:marker val="1"/>
         <c:axId val="1"/>
         <c:axId val="2"/>
       </c:lineChart>
@@ -1437,9 +1446,11 @@
             <c:v>A</c:v>
           </c:tx>
           <c:spPr>
-            <a:solidFill xmlns:a="http://schemas.openxmlformats.org/drawingml/2006/main">
-              <a:srgbClr val="4472C4"/>
-            </a:solidFill>
+            <a:ln xmlns:a="http://schemas.openxmlformats.org/drawingml/2006/main" w="25400">
+              <a:solidFill>
+                <a:srgbClr val="4472C4"/>
+              </a:solidFill>
+            </a:ln>
           </c:spPr>
           <c:cat>
             <c:strLit>
@@ -1490,9 +1501,11 @@
             <c:v>B</c:v>
           </c:tx>
           <c:spPr>
-            <a:solidFill xmlns:a="http://schemas.openxmlformats.org/drawingml/2006/main">
-              <a:srgbClr val="ED7D31"/>
-            </a:solidFill>
+            <a:ln xmlns:a="http://schemas.openxmlformats.org/drawingml/2006/main" w="25400">
+              <a:solidFill>
+                <a:srgbClr val="ED7D31"/>
+              </a:solidFill>
+            </a:ln>
           </c:spPr>
           <c:cat>
             <c:strLit>
@@ -1536,7 +1549,6 @@
             </c:numLit>
           </c:val>
         </c:ser>
-        <c:marker val="1"/>
         <c:axId val="1"/>
         <c:axId val="2"/>
       </c:lineChart>
@@ -1612,9 +1624,11 @@
             <c:v>A</c:v>
           </c:tx>
           <c:spPr>
-            <a:solidFill xmlns:a="http://schemas.openxmlformats.org/drawingml/2006/main">
-              <a:srgbClr val="4472C4"/>
-            </a:solidFill>
+            <a:ln xmlns:a="http://schemas.openxmlformats.org/drawingml/2006/main" w="25400">
+              <a:solidFill>
+                <a:srgbClr val="4472C4"/>
+              </a:solidFill>
+            </a:ln>
           </c:spPr>
           <c:cat>
             <c:strLit>
@@ -1664,10 +1678,12 @@
             <a:lstStyle xmlns:a="http://schemas.openxmlformats.org/drawingml/2006/main"/>
             <a:p xmlns:a="http://schemas.openxmlformats.org/drawingml/2006/main">
               <a:pPr>
-                <a:defRPr sz="1000" b="0">
+                <a:defRPr sz="1000">
                   <a:solidFill>
                     <a:srgbClr val="333333"/>
                   </a:solidFill>
+                  <a:latin typeface="Calibri"/>
+                  <a:ea typeface="Calibri"/>
                 </a:defRPr>
               </a:pPr>
             </a:p>
@@ -1679,7 +1695,6 @@
           <c:showSerName val="0"/>
           <c:showPercent val="0"/>
         </c:dLbls>
-        <c:marker val="1"/>
         <c:axId val="1"/>
         <c:axId val="2"/>
       </c:lineChart>
@@ -1755,9 +1770,11 @@
             <c:v>A</c:v>
           </c:tx>
           <c:spPr>
-            <a:solidFill xmlns:a="http://schemas.openxmlformats.org/drawingml/2006/main">
-              <a:srgbClr val="4472C4"/>
-            </a:solidFill>
+            <a:ln xmlns:a="http://schemas.openxmlformats.org/drawingml/2006/main" w="25400">
+              <a:solidFill>
+                <a:srgbClr val="4472C4"/>
+              </a:solidFill>
+            </a:ln>
           </c:spPr>
           <c:cat>
             <c:strLit>
@@ -1809,7 +1826,6 @@
           <c:showSerName val="0"/>
           <c:showPercent val="0"/>
         </c:dLbls>
-        <c:marker val="1"/>
         <c:axId val="1"/>
         <c:axId val="2"/>
       </c:lineChart>
@@ -1885,9 +1901,11 @@
             <c:v>A</c:v>
           </c:tx>
           <c:spPr>
-            <a:solidFill xmlns:a="http://schemas.openxmlformats.org/drawingml/2006/main">
-              <a:srgbClr val="4472C4"/>
-            </a:solidFill>
+            <a:ln xmlns:a="http://schemas.openxmlformats.org/drawingml/2006/main" w="25400">
+              <a:solidFill>
+                <a:srgbClr val="4472C4"/>
+              </a:solidFill>
+            </a:ln>
           </c:spPr>
           <c:cat>
             <c:strLit>
@@ -1931,7 +1949,6 @@
             </c:numLit>
           </c:val>
         </c:ser>
-        <c:marker val="1"/>
         <c:axId val="1"/>
         <c:axId val="2"/>
       </c:lineChart>
@@ -2007,9 +2024,11 @@
             <c:v>A</c:v>
           </c:tx>
           <c:spPr>
-            <a:solidFill xmlns:a="http://schemas.openxmlformats.org/drawingml/2006/main">
-              <a:srgbClr val="4472C4"/>
-            </a:solidFill>
+            <a:ln xmlns:a="http://schemas.openxmlformats.org/drawingml/2006/main" w="25400">
+              <a:solidFill>
+                <a:srgbClr val="4472C4"/>
+              </a:solidFill>
+            </a:ln>
           </c:spPr>
           <c:cat>
             <c:strLit>
@@ -2060,9 +2079,11 @@
             <c:v>B</c:v>
           </c:tx>
           <c:spPr>
-            <a:solidFill xmlns:a="http://schemas.openxmlformats.org/drawingml/2006/main">
-              <a:srgbClr val="ED7D31"/>
-            </a:solidFill>
+            <a:ln xmlns:a="http://schemas.openxmlformats.org/drawingml/2006/main" w="25400">
+              <a:solidFill>
+                <a:srgbClr val="ED7D31"/>
+              </a:solidFill>
+            </a:ln>
           </c:spPr>
           <c:cat>
             <c:strLit>
@@ -2106,7 +2127,6 @@
             </c:numLit>
           </c:val>
         </c:ser>
-        <c:marker val="1"/>
         <c:axId val="1"/>
         <c:axId val="2"/>
       </c:lineChart>
@@ -2186,9 +2206,11 @@
             <c:v>A</c:v>
           </c:tx>
           <c:spPr>
-            <a:solidFill xmlns:a="http://schemas.openxmlformats.org/drawingml/2006/main">
-              <a:srgbClr val="4472C4"/>
-            </a:solidFill>
+            <a:ln xmlns:a="http://schemas.openxmlformats.org/drawingml/2006/main" w="25400">
+              <a:solidFill>
+                <a:srgbClr val="4472C4"/>
+              </a:solidFill>
+            </a:ln>
           </c:spPr>
           <c:cat>
             <c:strLit>
@@ -2238,10 +2260,12 @@
             <a:lstStyle xmlns:a="http://schemas.openxmlformats.org/drawingml/2006/main"/>
             <a:p xmlns:a="http://schemas.openxmlformats.org/drawingml/2006/main">
               <a:pPr>
-                <a:defRPr sz="1200" b="0">
+                <a:defRPr sz="1200">
                   <a:solidFill>
                     <a:srgbClr val="C00000"/>
                   </a:solidFill>
+                  <a:latin typeface="Georgia"/>
+                  <a:ea typeface="Georgia"/>
                 </a:defRPr>
               </a:pPr>
             </a:p>
@@ -2253,7 +2277,6 @@
           <c:showSerName val="0"/>
           <c:showPercent val="0"/>
         </c:dLbls>
-        <c:marker val="1"/>
         <c:axId val="1"/>
         <c:axId val="2"/>
       </c:lineChart>
@@ -2329,9 +2352,11 @@
             <c:v>A</c:v>
           </c:tx>
           <c:spPr>
-            <a:solidFill xmlns:a="http://schemas.openxmlformats.org/drawingml/2006/main">
-              <a:srgbClr val="4472C4"/>
-            </a:solidFill>
+            <a:ln xmlns:a="http://schemas.openxmlformats.org/drawingml/2006/main" w="25400">
+              <a:solidFill>
+                <a:srgbClr val="4472C4"/>
+              </a:solidFill>
+            </a:ln>
           </c:spPr>
           <c:cat>
             <c:strLit>
@@ -2375,7 +2400,6 @@
             </c:numLit>
           </c:val>
         </c:ser>
-        <c:marker val="1"/>
         <c:axId val="1"/>
         <c:axId val="2"/>
       </c:lineChart>
@@ -2534,9 +2558,11 @@
             <c:v>A</c:v>
           </c:tx>
           <c:spPr>
-            <a:solidFill xmlns:a="http://schemas.openxmlformats.org/drawingml/2006/main">
-              <a:srgbClr val="4472C4"/>
-            </a:solidFill>
+            <a:ln xmlns:a="http://schemas.openxmlformats.org/drawingml/2006/main" w="25400">
+              <a:solidFill>
+                <a:srgbClr val="4472C4"/>
+              </a:solidFill>
+            </a:ln>
           </c:spPr>
           <c:cat>
             <c:strLit>
@@ -2580,7 +2606,6 @@
             </c:numLit>
           </c:val>
         </c:ser>
-        <c:marker val="1"/>
         <c:axId val="1"/>
         <c:axId val="2"/>
       </c:lineChart>
@@ -2673,9 +2698,11 @@
             <c:v>A</c:v>
           </c:tx>
           <c:spPr>
-            <a:solidFill xmlns:a="http://schemas.openxmlformats.org/drawingml/2006/main">
-              <a:srgbClr val="4472C4"/>
-            </a:solidFill>
+            <a:ln xmlns:a="http://schemas.openxmlformats.org/drawingml/2006/main" w="25400">
+              <a:solidFill>
+                <a:srgbClr val="4472C4"/>
+              </a:solidFill>
+            </a:ln>
           </c:spPr>
           <c:cat>
             <c:strLit>
@@ -2725,7 +2752,6 @@
             </c:numLit>
           </c:val>
         </c:ser>
-        <c:marker val="1"/>
         <c:axId val="1"/>
         <c:axId val="2"/>
       </c:lineChart>
@@ -2817,9 +2843,11 @@
             <c:v>Growth</c:v>
           </c:tx>
           <c:spPr>
-            <a:solidFill xmlns:a="http://schemas.openxmlformats.org/drawingml/2006/main">
-              <a:srgbClr val="4472C4"/>
-            </a:solidFill>
+            <a:ln xmlns:a="http://schemas.openxmlformats.org/drawingml/2006/main" w="25400">
+              <a:solidFill>
+                <a:srgbClr val="4472C4"/>
+              </a:solidFill>
+            </a:ln>
           </c:spPr>
           <c:cat>
             <c:strLit>
@@ -2863,7 +2891,6 @@
             </c:numLit>
           </c:val>
         </c:ser>
-        <c:marker val="1"/>
         <c:axId val="1"/>
         <c:axId val="2"/>
       </c:lineChart>
@@ -2942,9 +2969,11 @@
             <c:v>High</c:v>
           </c:tx>
           <c:spPr>
-            <a:solidFill xmlns:a="http://schemas.openxmlformats.org/drawingml/2006/main">
-              <a:srgbClr val="4472C4"/>
-            </a:solidFill>
+            <a:ln xmlns:a="http://schemas.openxmlformats.org/drawingml/2006/main" w="25400">
+              <a:solidFill>
+                <a:srgbClr val="4472C4"/>
+              </a:solidFill>
+            </a:ln>
           </c:spPr>
           <c:cat>
             <c:strLit>
@@ -2995,9 +3024,11 @@
             <c:v>Low</c:v>
           </c:tx>
           <c:spPr>
-            <a:solidFill xmlns:a="http://schemas.openxmlformats.org/drawingml/2006/main">
-              <a:srgbClr val="ED7D31"/>
-            </a:solidFill>
+            <a:ln xmlns:a="http://schemas.openxmlformats.org/drawingml/2006/main" w="25400">
+              <a:solidFill>
+                <a:srgbClr val="ED7D31"/>
+              </a:solidFill>
+            </a:ln>
           </c:spPr>
           <c:cat>
             <c:strLit>
@@ -3051,7 +3082,6 @@
           </c:spPr>
         </c:dropLines>
         <c:hiLowLines/>
-        <c:marker val="1"/>
         <c:axId val="1"/>
         <c:axId val="2"/>
       </c:lineChart>
@@ -3131,9 +3161,11 @@
             <c:v>Open</c:v>
           </c:tx>
           <c:spPr>
-            <a:solidFill xmlns:a="http://schemas.openxmlformats.org/drawingml/2006/main">
-              <a:srgbClr val="4472C4"/>
-            </a:solidFill>
+            <a:ln xmlns:a="http://schemas.openxmlformats.org/drawingml/2006/main" w="25400">
+              <a:solidFill>
+                <a:srgbClr val="4472C4"/>
+              </a:solidFill>
+            </a:ln>
           </c:spPr>
           <c:cat>
             <c:strLit>
@@ -3184,9 +3216,11 @@
             <c:v>Close</c:v>
           </c:tx>
           <c:spPr>
-            <a:solidFill xmlns:a="http://schemas.openxmlformats.org/drawingml/2006/main">
-              <a:srgbClr val="ED7D31"/>
-            </a:solidFill>
+            <a:ln xmlns:a="http://schemas.openxmlformats.org/drawingml/2006/main" w="25400">
+              <a:solidFill>
+                <a:srgbClr val="ED7D31"/>
+              </a:solidFill>
+            </a:ln>
           </c:spPr>
           <c:cat>
             <c:strLit>
@@ -3247,7 +3281,6 @@
             </c:spPr>
           </c:downBars>
         </c:upDownBars>
-        <c:marker val="1"/>
         <c:axId val="1"/>
         <c:axId val="2"/>
       </c:lineChart>
@@ -3327,13 +3360,38 @@
             <c:v>A</c:v>
           </c:tx>
           <c:spPr>
-            <a:solidFill xmlns:a="http://schemas.openxmlformats.org/drawingml/2006/main">
-              <a:srgbClr val="4472C4"/>
-            </a:solidFill>
+            <a:ln xmlns:a="http://schemas.openxmlformats.org/drawingml/2006/main" w="25400">
+              <a:solidFill>
+                <a:srgbClr val="4472C4"/>
+              </a:solidFill>
+            </a:ln>
           </c:spPr>
           <c:trendline>
             <c:trendlineType val="linear"/>
           </c:trendline>
+          <c:errBars>
+            <c:errDir val="y"/>
+            <c:errBarType val="both"/>
+            <c:errValType val="stdDev"/>
+            <c:plus>
+              <c:numLit>
+                <c:formatCode>General</c:formatCode>
+                <c:ptCount val="1"/>
+                <c:pt idx="0">
+                  <c:v>1</c:v>
+                </c:pt>
+              </c:numLit>
+            </c:plus>
+            <c:minus>
+              <c:numLit>
+                <c:formatCode>General</c:formatCode>
+                <c:ptCount val="1"/>
+                <c:pt idx="0">
+                  <c:v>1</c:v>
+                </c:pt>
+              </c:numLit>
+            </c:minus>
+          </c:errBars>
           <c:cat>
             <c:strLit>
               <c:ptCount val="5"/>
@@ -3376,7 +3434,6 @@
             </c:numLit>
           </c:val>
         </c:ser>
-        <c:marker val="1"/>
         <c:axId val="1"/>
         <c:axId val="2"/>
       </c:lineChart>
@@ -3452,9 +3509,11 @@
             <c:v>A</c:v>
           </c:tx>
           <c:spPr>
-            <a:solidFill xmlns:a="http://schemas.openxmlformats.org/drawingml/2006/main">
-              <a:srgbClr val="4472C4"/>
-            </a:solidFill>
+            <a:ln xmlns:a="http://schemas.openxmlformats.org/drawingml/2006/main" w="25400">
+              <a:solidFill>
+                <a:srgbClr val="4472C4"/>
+              </a:solidFill>
+            </a:ln>
           </c:spPr>
           <c:cat>
             <c:strLit>
@@ -3537,7 +3596,6 @@
             </c:numLit>
           </c:val>
         </c:ser>
-        <c:marker val="1"/>
         <c:axId val="1"/>
         <c:axId val="2"/>
       </c:lineChart>
@@ -3614,9 +3672,6 @@
             <c:v>A</c:v>
           </c:tx>
           <c:spPr>
-            <a:solidFill xmlns:a="http://schemas.openxmlformats.org/drawingml/2006/main">
-              <a:srgbClr val="4472C4"/>
-            </a:solidFill>
             <a:ln xmlns:a="http://schemas.openxmlformats.org/drawingml/2006/main" w="25400">
               <a:solidFill>
                 <a:srgbClr val="4472C4"/>
@@ -3672,9 +3727,6 @@
             <c:v>B</c:v>
           </c:tx>
           <c:spPr>
-            <a:solidFill xmlns:a="http://schemas.openxmlformats.org/drawingml/2006/main">
-              <a:srgbClr val="ED7D31"/>
-            </a:solidFill>
             <a:ln xmlns:a="http://schemas.openxmlformats.org/drawingml/2006/main" w="25400">
               <a:solidFill>
                 <a:srgbClr val="ED7D31"/>
@@ -3723,7 +3775,6 @@
             </c:numLit>
           </c:val>
         </c:ser>
-        <c:marker val="1"/>
         <c:axId val="1"/>
         <c:axId val="2"/>
       </c:lineChart>
@@ -3856,9 +3907,11 @@
             <c:v>A</c:v>
           </c:tx>
           <c:spPr>
-            <a:solidFill xmlns:a="http://schemas.openxmlformats.org/drawingml/2006/main">
-              <a:srgbClr val="4472C4"/>
-            </a:solidFill>
+            <a:ln xmlns:a="http://schemas.openxmlformats.org/drawingml/2006/main" w="25400">
+              <a:solidFill>
+                <a:srgbClr val="4472C4"/>
+              </a:solidFill>
+            </a:ln>
           </c:spPr>
           <c:cat>
             <c:strLit>
@@ -3909,9 +3962,11 @@
             <c:v>B</c:v>
           </c:tx>
           <c:spPr>
-            <a:solidFill xmlns:a="http://schemas.openxmlformats.org/drawingml/2006/main">
-              <a:srgbClr val="ED7D31"/>
-            </a:solidFill>
+            <a:ln xmlns:a="http://schemas.openxmlformats.org/drawingml/2006/main" w="25400">
+              <a:solidFill>
+                <a:srgbClr val="ED7D31"/>
+              </a:solidFill>
+            </a:ln>
           </c:spPr>
           <c:cat>
             <c:strLit>
@@ -3955,7 +4010,6 @@
             </c:numLit>
           </c:val>
         </c:ser>
-        <c:marker val="1"/>
         <c:axId val="1"/>
         <c:axId val="2"/>
       </c:lineChart>
@@ -4040,9 +4094,6 @@
             <c:v>A</c:v>
           </c:tx>
           <c:spPr>
-            <a:solidFill xmlns:a="http://schemas.openxmlformats.org/drawingml/2006/main">
-              <a:srgbClr val="5B9BD5"/>
-            </a:solidFill>
             <a:ln xmlns:a="http://schemas.openxmlformats.org/drawingml/2006/main" w="25400">
               <a:solidFill>
                 <a:srgbClr val="5B9BD5"/>
@@ -4098,9 +4149,6 @@
             <c:v>B</c:v>
           </c:tx>
           <c:spPr>
-            <a:solidFill xmlns:a="http://schemas.openxmlformats.org/drawingml/2006/main">
-              <a:srgbClr val="FF6B6B"/>
-            </a:solidFill>
             <a:ln xmlns:a="http://schemas.openxmlformats.org/drawingml/2006/main" w="25400">
               <a:solidFill>
                 <a:srgbClr val="FF6B6B"/>
@@ -4149,7 +4197,6 @@
             </c:numLit>
           </c:val>
         </c:ser>
-        <c:marker val="1"/>
         <c:axId val="1"/>
         <c:axId val="2"/>
       </c:lineChart>
@@ -4310,9 +4357,6 @@
             <c:v>A</c:v>
           </c:tx>
           <c:spPr>
-            <a:solidFill xmlns:a="http://schemas.openxmlformats.org/drawingml/2006/main">
-              <a:srgbClr val="2E75B6"/>
-            </a:solidFill>
             <a:ln xmlns:a="http://schemas.openxmlformats.org/drawingml/2006/main" w="25400">
               <a:solidFill>
                 <a:srgbClr val="2E75B6"/>
@@ -4368,9 +4412,6 @@
             <c:v>B</c:v>
           </c:tx>
           <c:spPr>
-            <a:solidFill xmlns:a="http://schemas.openxmlformats.org/drawingml/2006/main">
-              <a:srgbClr val="44546A"/>
-            </a:solidFill>
             <a:ln xmlns:a="http://schemas.openxmlformats.org/drawingml/2006/main" w="25400">
               <a:solidFill>
                 <a:srgbClr val="44546A"/>
@@ -4419,7 +4460,6 @@
             </c:numLit>
           </c:val>
         </c:ser>
-        <c:marker val="1"/>
         <c:axId val="1"/>
         <c:axId val="2"/>
       </c:lineChart>
@@ -4571,9 +4611,6 @@
             <c:v>Alpha</c:v>
           </c:tx>
           <c:spPr>
-            <a:solidFill xmlns:a="http://schemas.openxmlformats.org/drawingml/2006/main">
-              <a:srgbClr val="C00000"/>
-            </a:solidFill>
             <a:ln xmlns:a="http://schemas.openxmlformats.org/drawingml/2006/main" w="31750">
               <a:solidFill>
                 <a:srgbClr val="C00000"/>
@@ -4635,9 +4672,6 @@
             <c:v>Beta</c:v>
           </c:tx>
           <c:spPr>
-            <a:solidFill xmlns:a="http://schemas.openxmlformats.org/drawingml/2006/main">
-              <a:srgbClr val="2E75B6"/>
-            </a:solidFill>
             <a:ln xmlns:a="http://schemas.openxmlformats.org/drawingml/2006/main" w="19050">
               <a:solidFill>
                 <a:srgbClr val="2E75B6"/>
@@ -4771,9 +4805,11 @@
             <c:v>A</c:v>
           </c:tx>
           <c:spPr>
-            <a:solidFill xmlns:a="http://schemas.openxmlformats.org/drawingml/2006/main">
-              <a:srgbClr val="4472C4"/>
-            </a:solidFill>
+            <a:ln xmlns:a="http://schemas.openxmlformats.org/drawingml/2006/main" w="25400">
+              <a:solidFill>
+                <a:srgbClr val="4472C4"/>
+              </a:solidFill>
+            </a:ln>
           </c:spPr>
           <c:cat>
             <c:strLit>
@@ -4824,9 +4860,11 @@
             <c:v>B</c:v>
           </c:tx>
           <c:spPr>
-            <a:solidFill xmlns:a="http://schemas.openxmlformats.org/drawingml/2006/main">
-              <a:srgbClr val="ED7D31"/>
-            </a:solidFill>
+            <a:ln xmlns:a="http://schemas.openxmlformats.org/drawingml/2006/main" w="25400">
+              <a:solidFill>
+                <a:srgbClr val="ED7D31"/>
+              </a:solidFill>
+            </a:ln>
           </c:spPr>
           <c:cat>
             <c:strLit>
@@ -4959,10 +4997,11 @@
             <c:v>A</c:v>
           </c:tx>
           <c:spPr>
-            <a:solidFill xmlns:a="http://schemas.openxmlformats.org/drawingml/2006/main">
-              <a:srgbClr val="4472C4"/>
-            </a:solidFill>
-            <a:ln xmlns:a="http://schemas.openxmlformats.org/drawingml/2006/main" w="25400"/>
+            <a:ln xmlns:a="http://schemas.openxmlformats.org/drawingml/2006/main" w="25400">
+              <a:solidFill>
+                <a:srgbClr val="4472C4"/>
+              </a:solidFill>
+            </a:ln>
           </c:spPr>
           <c:marker>
             <c:symbol val="circle"/>
@@ -5015,7 +5054,6 @@
             </c:numLit>
           </c:val>
         </c:ser>
-        <c:marker val="1"/>
         <c:axId val="1"/>
         <c:axId val="2"/>
       </c:lineChart>
@@ -5091,10 +5129,11 @@
             <c:v>A</c:v>
           </c:tx>
           <c:spPr>
-            <a:solidFill xmlns:a="http://schemas.openxmlformats.org/drawingml/2006/main">
-              <a:srgbClr val="4472C4"/>
-            </a:solidFill>
-            <a:ln xmlns:a="http://schemas.openxmlformats.org/drawingml/2006/main" w="25400"/>
+            <a:ln xmlns:a="http://schemas.openxmlformats.org/drawingml/2006/main" w="25400">
+              <a:solidFill>
+                <a:srgbClr val="4472C4"/>
+              </a:solidFill>
+            </a:ln>
           </c:spPr>
           <c:marker>
             <c:symbol val="square"/>
@@ -5142,7 +5181,6 @@
             </c:numLit>
           </c:val>
         </c:ser>
-        <c:marker val="1"/>
         <c:axId val="1"/>
         <c:axId val="2"/>
       </c:lineChart>
@@ -5218,10 +5256,11 @@
             <c:v>A</c:v>
           </c:tx>
           <c:spPr>
-            <a:solidFill xmlns:a="http://schemas.openxmlformats.org/drawingml/2006/main">
-              <a:srgbClr val="4472C4"/>
-            </a:solidFill>
-            <a:ln xmlns:a="http://schemas.openxmlformats.org/drawingml/2006/main" w="25400"/>
+            <a:ln xmlns:a="http://schemas.openxmlformats.org/drawingml/2006/main" w="25400">
+              <a:solidFill>
+                <a:srgbClr val="4472C4"/>
+              </a:solidFill>
+            </a:ln>
           </c:spPr>
           <c:marker>
             <c:symbol val="diamond"/>
@@ -5274,7 +5313,6 @@
             </c:numLit>
           </c:val>
         </c:ser>
-        <c:marker val="1"/>
         <c:axId val="1"/>
         <c:axId val="2"/>
       </c:lineChart>
@@ -5350,9 +5388,11 @@
             <c:v>A</c:v>
           </c:tx>
           <c:spPr>
-            <a:solidFill xmlns:a="http://schemas.openxmlformats.org/drawingml/2006/main">
-              <a:srgbClr val="4472C4"/>
-            </a:solidFill>
+            <a:ln xmlns:a="http://schemas.openxmlformats.org/drawingml/2006/main" w="25400">
+              <a:solidFill>
+                <a:srgbClr val="4472C4"/>
+              </a:solidFill>
+            </a:ln>
           </c:spPr>
           <c:cat>
             <c:strLit>
@@ -5403,9 +5443,11 @@
             <c:v>B</c:v>
           </c:tx>
           <c:spPr>
-            <a:solidFill xmlns:a="http://schemas.openxmlformats.org/drawingml/2006/main">
-              <a:srgbClr val="ED7D31"/>
-            </a:solidFill>
+            <a:ln xmlns:a="http://schemas.openxmlformats.org/drawingml/2006/main" w="25400">
+              <a:solidFill>
+                <a:srgbClr val="ED7D31"/>
+              </a:solidFill>
+            </a:ln>
           </c:spPr>
           <c:cat>
             <c:strLit>
@@ -5529,10 +5571,11 @@
             <c:v>A</c:v>
           </c:tx>
           <c:spPr>
-            <a:solidFill xmlns:a="http://schemas.openxmlformats.org/drawingml/2006/main">
-              <a:srgbClr val="4472C4"/>
-            </a:solidFill>
-            <a:ln xmlns:a="http://schemas.openxmlformats.org/drawingml/2006/main" w="31750"/>
+            <a:ln xmlns:a="http://schemas.openxmlformats.org/drawingml/2006/main" w="31750">
+              <a:solidFill>
+                <a:srgbClr val="4472C4"/>
+              </a:solidFill>
+            </a:ln>
           </c:spPr>
           <c:cat>
             <c:strLit>
@@ -5577,7 +5620,6 @@
           </c:val>
           <c:smooth val="1"/>
         </c:ser>
-        <c:marker val="1"/>
         <c:smooth val="1"/>
         <c:axId val="1"/>
         <c:axId val="2"/>
@@ -5633,8 +5675,8 @@
       <p:grpSpPr/>
       <p:sp>
         <p:nvSpPr>
-          <p:cNvPr id="10000" name="TextBox 1"/>
-          <p:cNvSpPr/>
+          <p:cNvPr id="100000" name="TextBox 1"/>
+          <p:cNvSpPr txBox="1"/>
           <p:nvPr/>
         </p:nvSpPr>
         <p:spPr>
@@ -5661,7 +5703,7 @@
       </p:sp>
       <p:graphicFrame>
         <p:nvGraphicFramePr>
-          <p:cNvPr id="10001" name="line"/>
+          <p:cNvPr id="100001" name="line"/>
           <p:cNvGraphicFramePr/>
           <p:nvPr/>
         </p:nvGraphicFramePr>
@@ -5671,13 +5713,13 @@
         </p:xfrm>
         <a:graphic xmlns:a="http://schemas.openxmlformats.org/drawingml/2006/main">
           <a:graphicData uri="http://schemas.openxmlformats.org/drawingml/2006/chart">
-            <c:chart xmlns:r="http://schemas.openxmlformats.org/officeDocument/2006/relationships" xmlns:c="http://schemas.openxmlformats.org/drawingml/2006/chart" r:id="R50ed1d8603af4b0e"/>
+            <c:chart xmlns:r="http://schemas.openxmlformats.org/officeDocument/2006/relationships" xmlns:c="http://schemas.openxmlformats.org/drawingml/2006/chart" r:id="Rb8e69b583d8f4493"/>
           </a:graphicData>
         </a:graphic>
       </p:graphicFrame>
       <p:graphicFrame>
         <p:nvGraphicFramePr>
-          <p:cNvPr id="10002" name="stackedLine"/>
+          <p:cNvPr id="100002" name="stackedLine"/>
           <p:cNvGraphicFramePr/>
           <p:nvPr/>
         </p:nvGraphicFramePr>
@@ -5687,13 +5729,13 @@
         </p:xfrm>
         <a:graphic xmlns:a="http://schemas.openxmlformats.org/drawingml/2006/main">
           <a:graphicData uri="http://schemas.openxmlformats.org/drawingml/2006/chart">
-            <c:chart xmlns:r="http://schemas.openxmlformats.org/officeDocument/2006/relationships" xmlns:c="http://schemas.openxmlformats.org/drawingml/2006/chart" r:id="R93b7077508e14570"/>
+            <c:chart xmlns:r="http://schemas.openxmlformats.org/officeDocument/2006/relationships" xmlns:c="http://schemas.openxmlformats.org/drawingml/2006/chart" r:id="R2fdb279e3f924cf2"/>
           </a:graphicData>
         </a:graphic>
       </p:graphicFrame>
       <p:graphicFrame>
         <p:nvGraphicFramePr>
-          <p:cNvPr id="10003" name="percentStackedLine"/>
+          <p:cNvPr id="100003" name="percentStackedLine"/>
           <p:cNvGraphicFramePr/>
           <p:nvPr/>
         </p:nvGraphicFramePr>
@@ -5703,13 +5745,13 @@
         </p:xfrm>
         <a:graphic xmlns:a="http://schemas.openxmlformats.org/drawingml/2006/main">
           <a:graphicData uri="http://schemas.openxmlformats.org/drawingml/2006/chart">
-            <c:chart xmlns:r="http://schemas.openxmlformats.org/officeDocument/2006/relationships" xmlns:c="http://schemas.openxmlformats.org/drawingml/2006/chart" r:id="R17434bf1254c4e17"/>
+            <c:chart xmlns:r="http://schemas.openxmlformats.org/officeDocument/2006/relationships" xmlns:c="http://schemas.openxmlformats.org/drawingml/2006/chart" r:id="R11adf31e7a1d4ecd"/>
           </a:graphicData>
         </a:graphic>
       </p:graphicFrame>
       <p:graphicFrame>
         <p:nvGraphicFramePr>
-          <p:cNvPr id="10004" name="line3d"/>
+          <p:cNvPr id="100004" name="line3d"/>
           <p:cNvGraphicFramePr/>
           <p:nvPr/>
         </p:nvGraphicFramePr>
@@ -5719,7 +5761,7 @@
         </p:xfrm>
         <a:graphic xmlns:a="http://schemas.openxmlformats.org/drawingml/2006/main">
           <a:graphicData uri="http://schemas.openxmlformats.org/drawingml/2006/chart">
-            <c:chart xmlns:r="http://schemas.openxmlformats.org/officeDocument/2006/relationships" xmlns:c="http://schemas.openxmlformats.org/drawingml/2006/chart" r:id="Raf344b37dde94d60"/>
+            <c:chart xmlns:r="http://schemas.openxmlformats.org/officeDocument/2006/relationships" xmlns:c="http://schemas.openxmlformats.org/drawingml/2006/chart" r:id="Rbd406bde80ce4a46"/>
           </a:graphicData>
         </a:graphic>
       </p:graphicFrame>
@@ -5740,8 +5782,8 @@
       <p:grpSpPr/>
       <p:sp>
         <p:nvSpPr>
-          <p:cNvPr id="10005" name="TextBox 1"/>
-          <p:cNvSpPr/>
+          <p:cNvPr id="100005" name="TextBox 1"/>
+          <p:cNvSpPr txBox="1"/>
           <p:nvPr/>
         </p:nvSpPr>
         <p:spPr>
@@ -5768,7 +5810,7 @@
       </p:sp>
       <p:graphicFrame>
         <p:nvGraphicFramePr>
-          <p:cNvPr id="10006" name="marker=circle:8:FF0000"/>
+          <p:cNvPr id="100006" name="marker=circle:8:FF0000"/>
           <p:cNvGraphicFramePr/>
           <p:nvPr/>
         </p:nvGraphicFramePr>
@@ -5778,13 +5820,13 @@
         </p:xfrm>
         <a:graphic xmlns:a="http://schemas.openxmlformats.org/drawingml/2006/main">
           <a:graphicData uri="http://schemas.openxmlformats.org/drawingml/2006/chart">
-            <c:chart xmlns:r="http://schemas.openxmlformats.org/officeDocument/2006/relationships" xmlns:c="http://schemas.openxmlformats.org/drawingml/2006/chart" r:id="R12d52631d60f4cb0"/>
+            <c:chart xmlns:r="http://schemas.openxmlformats.org/officeDocument/2006/relationships" xmlns:c="http://schemas.openxmlformats.org/drawingml/2006/chart" r:id="R8c4133d9852a4a92"/>
           </a:graphicData>
         </a:graphic>
       </p:graphicFrame>
       <p:graphicFrame>
         <p:nvGraphicFramePr>
-          <p:cNvPr id="10007" name="marker=square:6"/>
+          <p:cNvPr id="100007" name="marker=square:6"/>
           <p:cNvGraphicFramePr/>
           <p:nvPr/>
         </p:nvGraphicFramePr>
@@ -5794,13 +5836,13 @@
         </p:xfrm>
         <a:graphic xmlns:a="http://schemas.openxmlformats.org/drawingml/2006/main">
           <a:graphicData uri="http://schemas.openxmlformats.org/drawingml/2006/chart">
-            <c:chart xmlns:r="http://schemas.openxmlformats.org/officeDocument/2006/relationships" xmlns:c="http://schemas.openxmlformats.org/drawingml/2006/chart" r:id="R36d93281d4aa4f92"/>
+            <c:chart xmlns:r="http://schemas.openxmlformats.org/officeDocument/2006/relationships" xmlns:c="http://schemas.openxmlformats.org/drawingml/2006/chart" r:id="Rd8a2ecc6cbc94c8e"/>
           </a:graphicData>
         </a:graphic>
       </p:graphicFrame>
       <p:graphicFrame>
         <p:nvGraphicFramePr>
-          <p:cNvPr id="10008" name="marker=diamond:10:0070C0"/>
+          <p:cNvPr id="100008" name="marker=diamond:10:0070C0"/>
           <p:cNvGraphicFramePr/>
           <p:nvPr/>
         </p:nvGraphicFramePr>
@@ -5810,13 +5852,13 @@
         </p:xfrm>
         <a:graphic xmlns:a="http://schemas.openxmlformats.org/drawingml/2006/main">
           <a:graphicData uri="http://schemas.openxmlformats.org/drawingml/2006/chart">
-            <c:chart xmlns:r="http://schemas.openxmlformats.org/officeDocument/2006/relationships" xmlns:c="http://schemas.openxmlformats.org/drawingml/2006/chart" r:id="R5c5ceb4255b34196"/>
+            <c:chart xmlns:r="http://schemas.openxmlformats.org/officeDocument/2006/relationships" xmlns:c="http://schemas.openxmlformats.org/drawingml/2006/chart" r:id="Rb85da6fedf27400f"/>
           </a:graphicData>
         </a:graphic>
       </p:graphicFrame>
       <p:graphicFrame>
         <p:nvGraphicFramePr>
-          <p:cNvPr id="10009" name="showMarker=true (default markers)"/>
+          <p:cNvPr id="100009" name="showMarker=true (default markers)"/>
           <p:cNvGraphicFramePr/>
           <p:nvPr/>
         </p:nvGraphicFramePr>
@@ -5826,7 +5868,7 @@
         </p:xfrm>
         <a:graphic xmlns:a="http://schemas.openxmlformats.org/drawingml/2006/main">
           <a:graphicData uri="http://schemas.openxmlformats.org/drawingml/2006/chart">
-            <c:chart xmlns:r="http://schemas.openxmlformats.org/officeDocument/2006/relationships" xmlns:c="http://schemas.openxmlformats.org/drawingml/2006/chart" r:id="Rb008251a81d343ed"/>
+            <c:chart xmlns:r="http://schemas.openxmlformats.org/officeDocument/2006/relationships" xmlns:c="http://schemas.openxmlformats.org/drawingml/2006/chart" r:id="R58e73a2e3dfc419b"/>
           </a:graphicData>
         </a:graphic>
       </p:graphicFrame>
@@ -5847,8 +5889,8 @@
       <p:grpSpPr/>
       <p:sp>
         <p:nvSpPr>
-          <p:cNvPr id="10010" name="TextBox 1"/>
-          <p:cNvSpPr/>
+          <p:cNvPr id="100010" name="TextBox 1"/>
+          <p:cNvSpPr txBox="1"/>
           <p:nvPr/>
         </p:nvSpPr>
         <p:spPr>
@@ -5875,7 +5917,7 @@
       </p:sp>
       <p:graphicFrame>
         <p:nvGraphicFramePr>
-          <p:cNvPr id="10011" name="smooth=true"/>
+          <p:cNvPr id="100011" name="smooth=true"/>
           <p:cNvGraphicFramePr/>
           <p:nvPr/>
         </p:nvGraphicFramePr>
@@ -5885,13 +5927,13 @@
         </p:xfrm>
         <a:graphic xmlns:a="http://schemas.openxmlformats.org/drawingml/2006/main">
           <a:graphicData uri="http://schemas.openxmlformats.org/drawingml/2006/chart">
-            <c:chart xmlns:r="http://schemas.openxmlformats.org/officeDocument/2006/relationships" xmlns:c="http://schemas.openxmlformats.org/drawingml/2006/chart" r:id="R80120fa791884c5a"/>
+            <c:chart xmlns:r="http://schemas.openxmlformats.org/officeDocument/2006/relationships" xmlns:c="http://schemas.openxmlformats.org/drawingml/2006/chart" r:id="R39e850a4c5604dcd"/>
           </a:graphicData>
         </a:graphic>
       </p:graphicFrame>
       <p:graphicFrame>
         <p:nvGraphicFramePr>
-          <p:cNvPr id="10012" name="linedash=dash"/>
+          <p:cNvPr id="100012" name="linedash=dash"/>
           <p:cNvGraphicFramePr/>
           <p:nvPr/>
         </p:nvGraphicFramePr>
@@ -5901,13 +5943,13 @@
         </p:xfrm>
         <a:graphic xmlns:a="http://schemas.openxmlformats.org/drawingml/2006/main">
           <a:graphicData uri="http://schemas.openxmlformats.org/drawingml/2006/chart">
-            <c:chart xmlns:r="http://schemas.openxmlformats.org/officeDocument/2006/relationships" xmlns:c="http://schemas.openxmlformats.org/drawingml/2006/chart" r:id="R9acc391d55e64c30"/>
+            <c:chart xmlns:r="http://schemas.openxmlformats.org/officeDocument/2006/relationships" xmlns:c="http://schemas.openxmlformats.org/drawingml/2006/chart" r:id="R3bae49d624c04312"/>
           </a:graphicData>
         </a:graphic>
       </p:graphicFrame>
       <p:graphicFrame>
         <p:nvGraphicFramePr>
-          <p:cNvPr id="10013" name="linedash=dot"/>
+          <p:cNvPr id="100013" name="linedash=dot"/>
           <p:cNvGraphicFramePr/>
           <p:nvPr/>
         </p:nvGraphicFramePr>
@@ -5917,13 +5959,13 @@
         </p:xfrm>
         <a:graphic xmlns:a="http://schemas.openxmlformats.org/drawingml/2006/main">
           <a:graphicData uri="http://schemas.openxmlformats.org/drawingml/2006/chart">
-            <c:chart xmlns:r="http://schemas.openxmlformats.org/officeDocument/2006/relationships" xmlns:c="http://schemas.openxmlformats.org/drawingml/2006/chart" r:id="R2aafdb5a97d345e7"/>
+            <c:chart xmlns:r="http://schemas.openxmlformats.org/officeDocument/2006/relationships" xmlns:c="http://schemas.openxmlformats.org/drawingml/2006/chart" r:id="Rf7786ee43ddb4184"/>
           </a:graphicData>
         </a:graphic>
       </p:graphicFrame>
       <p:graphicFrame>
         <p:nvGraphicFramePr>
-          <p:cNvPr id="10014" name="linedash=dashDot"/>
+          <p:cNvPr id="100014" name="linedash=dashDot"/>
           <p:cNvGraphicFramePr/>
           <p:nvPr/>
         </p:nvGraphicFramePr>
@@ -5933,7 +5975,7 @@
         </p:xfrm>
         <a:graphic xmlns:a="http://schemas.openxmlformats.org/drawingml/2006/main">
           <a:graphicData uri="http://schemas.openxmlformats.org/drawingml/2006/chart">
-            <c:chart xmlns:r="http://schemas.openxmlformats.org/officeDocument/2006/relationships" xmlns:c="http://schemas.openxmlformats.org/drawingml/2006/chart" r:id="Ra927662a7f724d47"/>
+            <c:chart xmlns:r="http://schemas.openxmlformats.org/officeDocument/2006/relationships" xmlns:c="http://schemas.openxmlformats.org/drawingml/2006/chart" r:id="Rdeeb5a96e6294e9a"/>
           </a:graphicData>
         </a:graphic>
       </p:graphicFrame>
@@ -5954,8 +5996,8 @@
       <p:grpSpPr/>
       <p:sp>
         <p:nvSpPr>
-          <p:cNvPr id="10015" name="TextBox 1"/>
-          <p:cNvSpPr/>
+          <p:cNvPr id="100015" name="TextBox 1"/>
+          <p:cNvSpPr txBox="1"/>
           <p:nvPr/>
         </p:nvSpPr>
         <p:spPr>
@@ -5982,7 +6024,7 @@
       </p:sp>
       <p:graphicFrame>
         <p:nvGraphicFramePr>
-          <p:cNvPr id="10016" name="Styled title"/>
+          <p:cNvPr id="100016" name="Styled title"/>
           <p:cNvGraphicFramePr/>
           <p:nvPr/>
         </p:nvGraphicFramePr>
@@ -5992,13 +6034,13 @@
         </p:xfrm>
         <a:graphic xmlns:a="http://schemas.openxmlformats.org/drawingml/2006/main">
           <a:graphicData uri="http://schemas.openxmlformats.org/drawingml/2006/chart">
-            <c:chart xmlns:r="http://schemas.openxmlformats.org/officeDocument/2006/relationships" xmlns:c="http://schemas.openxmlformats.org/drawingml/2006/chart" r:id="Rdf9ef567fc6c4f05"/>
+            <c:chart xmlns:r="http://schemas.openxmlformats.org/officeDocument/2006/relationships" xmlns:c="http://schemas.openxmlformats.org/drawingml/2006/chart" r:id="Rcb04fe8791ba40e8"/>
           </a:graphicData>
         </a:graphic>
       </p:graphicFrame>
       <p:graphicFrame>
         <p:nvGraphicFramePr>
-          <p:cNvPr id="10017" name="legend=top + legendFont"/>
+          <p:cNvPr id="100017" name="legend=top + legendFont"/>
           <p:cNvGraphicFramePr/>
           <p:nvPr/>
         </p:nvGraphicFramePr>
@@ -6008,13 +6050,13 @@
         </p:xfrm>
         <a:graphic xmlns:a="http://schemas.openxmlformats.org/drawingml/2006/main">
           <a:graphicData uri="http://schemas.openxmlformats.org/drawingml/2006/chart">
-            <c:chart xmlns:r="http://schemas.openxmlformats.org/officeDocument/2006/relationships" xmlns:c="http://schemas.openxmlformats.org/drawingml/2006/chart" r:id="Rc4ded9fe932f4aeb"/>
+            <c:chart xmlns:r="http://schemas.openxmlformats.org/officeDocument/2006/relationships" xmlns:c="http://schemas.openxmlformats.org/drawingml/2006/chart" r:id="R3768e0d161ad419d"/>
           </a:graphicData>
         </a:graphic>
       </p:graphicFrame>
       <p:graphicFrame>
         <p:nvGraphicFramePr>
-          <p:cNvPr id="10018" name="legend.overlay=true"/>
+          <p:cNvPr id="100018" name="legend.overlay=true"/>
           <p:cNvGraphicFramePr/>
           <p:nvPr/>
         </p:nvGraphicFramePr>
@@ -6024,13 +6066,13 @@
         </p:xfrm>
         <a:graphic xmlns:a="http://schemas.openxmlformats.org/drawingml/2006/main">
           <a:graphicData uri="http://schemas.openxmlformats.org/drawingml/2006/chart">
-            <c:chart xmlns:r="http://schemas.openxmlformats.org/officeDocument/2006/relationships" xmlns:c="http://schemas.openxmlformats.org/drawingml/2006/chart" r:id="R45a37e08f31841b4"/>
+            <c:chart xmlns:r="http://schemas.openxmlformats.org/officeDocument/2006/relationships" xmlns:c="http://schemas.openxmlformats.org/drawingml/2006/chart" r:id="Rbc8f269627c949c0"/>
           </a:graphicData>
         </a:graphic>
       </p:graphicFrame>
       <p:graphicFrame>
         <p:nvGraphicFramePr>
-          <p:cNvPr id="10019" name="Chart 4"/>
+          <p:cNvPr id="100019" name="Chart 4"/>
           <p:cNvGraphicFramePr/>
           <p:nvPr/>
         </p:nvGraphicFramePr>
@@ -6040,7 +6082,7 @@
         </p:xfrm>
         <a:graphic xmlns:a="http://schemas.openxmlformats.org/drawingml/2006/main">
           <a:graphicData uri="http://schemas.openxmlformats.org/drawingml/2006/chart">
-            <c:chart xmlns:r="http://schemas.openxmlformats.org/officeDocument/2006/relationships" xmlns:c="http://schemas.openxmlformats.org/drawingml/2006/chart" r:id="R8e4d3bcd7bb649cc"/>
+            <c:chart xmlns:r="http://schemas.openxmlformats.org/officeDocument/2006/relationships" xmlns:c="http://schemas.openxmlformats.org/drawingml/2006/chart" r:id="R490e63124ac74401"/>
           </a:graphicData>
         </a:graphic>
       </p:graphicFrame>
@@ -6061,8 +6103,8 @@
       <p:grpSpPr/>
       <p:sp>
         <p:nvSpPr>
-          <p:cNvPr id="10020" name="TextBox 1"/>
-          <p:cNvSpPr/>
+          <p:cNvPr id="100020" name="TextBox 1"/>
+          <p:cNvSpPr txBox="1"/>
           <p:nvPr/>
         </p:nvSpPr>
         <p:spPr>
@@ -6089,7 +6131,7 @@
       </p:sp>
       <p:graphicFrame>
         <p:nvGraphicFramePr>
-          <p:cNvPr id="10021" name="dataLabels=value @ top"/>
+          <p:cNvPr id="100021" name="dataLabels=value @ top"/>
           <p:cNvGraphicFramePr/>
           <p:nvPr/>
         </p:nvGraphicFramePr>
@@ -6099,13 +6141,13 @@
         </p:xfrm>
         <a:graphic xmlns:a="http://schemas.openxmlformats.org/drawingml/2006/main">
           <a:graphicData uri="http://schemas.openxmlformats.org/drawingml/2006/chart">
-            <c:chart xmlns:r="http://schemas.openxmlformats.org/officeDocument/2006/relationships" xmlns:c="http://schemas.openxmlformats.org/drawingml/2006/chart" r:id="R053e01caa93546ff"/>
+            <c:chart xmlns:r="http://schemas.openxmlformats.org/officeDocument/2006/relationships" xmlns:c="http://schemas.openxmlformats.org/drawingml/2006/chart" r:id="Ra3e6ca49a3bb4c2f"/>
           </a:graphicData>
         </a:graphic>
       </p:graphicFrame>
       <p:graphicFrame>
         <p:nvGraphicFramePr>
-          <p:cNvPr id="10022" name="value,category"/>
+          <p:cNvPr id="100022" name="value,category"/>
           <p:cNvGraphicFramePr/>
           <p:nvPr/>
         </p:nvGraphicFramePr>
@@ -6115,13 +6157,13 @@
         </p:xfrm>
         <a:graphic xmlns:a="http://schemas.openxmlformats.org/drawingml/2006/main">
           <a:graphicData uri="http://schemas.openxmlformats.org/drawingml/2006/chart">
-            <c:chart xmlns:r="http://schemas.openxmlformats.org/officeDocument/2006/relationships" xmlns:c="http://schemas.openxmlformats.org/drawingml/2006/chart" r:id="Re7b4d0ce9b4843a1"/>
+            <c:chart xmlns:r="http://schemas.openxmlformats.org/officeDocument/2006/relationships" xmlns:c="http://schemas.openxmlformats.org/drawingml/2006/chart" r:id="R995fb3a8104a4b94"/>
           </a:graphicData>
         </a:graphic>
       </p:graphicFrame>
       <p:graphicFrame>
         <p:nvGraphicFramePr>
-          <p:cNvPr id="10023" name="dataLabels=none"/>
+          <p:cNvPr id="100023" name="dataLabels=none"/>
           <p:cNvGraphicFramePr/>
           <p:nvPr/>
         </p:nvGraphicFramePr>
@@ -6131,13 +6173,13 @@
         </p:xfrm>
         <a:graphic xmlns:a="http://schemas.openxmlformats.org/drawingml/2006/main">
           <a:graphicData uri="http://schemas.openxmlformats.org/drawingml/2006/chart">
-            <c:chart xmlns:r="http://schemas.openxmlformats.org/officeDocument/2006/relationships" xmlns:c="http://schemas.openxmlformats.org/drawingml/2006/chart" r:id="R136e5496d94b4868"/>
+            <c:chart xmlns:r="http://schemas.openxmlformats.org/officeDocument/2006/relationships" xmlns:c="http://schemas.openxmlformats.org/drawingml/2006/chart" r:id="R51d53c7ab0704ded"/>
           </a:graphicData>
         </a:graphic>
       </p:graphicFrame>
       <p:graphicFrame>
         <p:nvGraphicFramePr>
-          <p:cNvPr id="10024" name="labelfont styled"/>
+          <p:cNvPr id="100024" name="labelfont styled"/>
           <p:cNvGraphicFramePr/>
           <p:nvPr/>
         </p:nvGraphicFramePr>
@@ -6147,7 +6189,7 @@
         </p:xfrm>
         <a:graphic xmlns:a="http://schemas.openxmlformats.org/drawingml/2006/main">
           <a:graphicData uri="http://schemas.openxmlformats.org/drawingml/2006/chart">
-            <c:chart xmlns:r="http://schemas.openxmlformats.org/officeDocument/2006/relationships" xmlns:c="http://schemas.openxmlformats.org/drawingml/2006/chart" r:id="Rbb1732e1b1f14676"/>
+            <c:chart xmlns:r="http://schemas.openxmlformats.org/officeDocument/2006/relationships" xmlns:c="http://schemas.openxmlformats.org/drawingml/2006/chart" r:id="Rf3254ee4fcd342eb"/>
           </a:graphicData>
         </a:graphic>
       </p:graphicFrame>
@@ -6168,8 +6210,8 @@
       <p:grpSpPr/>
       <p:sp>
         <p:nvSpPr>
-          <p:cNvPr id="10025" name="TextBox 1"/>
-          <p:cNvSpPr/>
+          <p:cNvPr id="100025" name="TextBox 1"/>
+          <p:cNvSpPr txBox="1"/>
           <p:nvPr/>
         </p:nvSpPr>
         <p:spPr>
@@ -6196,7 +6238,7 @@
       </p:sp>
       <p:graphicFrame>
         <p:nvGraphicFramePr>
-          <p:cNvPr id="10026" name="min/max + titles"/>
+          <p:cNvPr id="100026" name="min/max + titles"/>
           <p:cNvGraphicFramePr/>
           <p:nvPr/>
         </p:nvGraphicFramePr>
@@ -6206,13 +6248,13 @@
         </p:xfrm>
         <a:graphic xmlns:a="http://schemas.openxmlformats.org/drawingml/2006/main">
           <a:graphicData uri="http://schemas.openxmlformats.org/drawingml/2006/chart">
-            <c:chart xmlns:r="http://schemas.openxmlformats.org/officeDocument/2006/relationships" xmlns:c="http://schemas.openxmlformats.org/drawingml/2006/chart" r:id="R591cc5ebd25b4b5d"/>
+            <c:chart xmlns:r="http://schemas.openxmlformats.org/officeDocument/2006/relationships" xmlns:c="http://schemas.openxmlformats.org/drawingml/2006/chart" r:id="Rbd94cd136ba645d7"/>
           </a:graphicData>
         </a:graphic>
       </p:graphicFrame>
       <p:graphicFrame>
         <p:nvGraphicFramePr>
-          <p:cNvPr id="10027" name="gridlines + ticks"/>
+          <p:cNvPr id="100027" name="gridlines + ticks"/>
           <p:cNvGraphicFramePr/>
           <p:nvPr/>
         </p:nvGraphicFramePr>
@@ -6222,13 +6264,13 @@
         </p:xfrm>
         <a:graphic xmlns:a="http://schemas.openxmlformats.org/drawingml/2006/main">
           <a:graphicData uri="http://schemas.openxmlformats.org/drawingml/2006/chart">
-            <c:chart xmlns:r="http://schemas.openxmlformats.org/officeDocument/2006/relationships" xmlns:c="http://schemas.openxmlformats.org/drawingml/2006/chart" r:id="Re869c9c2a2104953"/>
+            <c:chart xmlns:r="http://schemas.openxmlformats.org/officeDocument/2006/relationships" xmlns:c="http://schemas.openxmlformats.org/drawingml/2006/chart" r:id="R25811ec9b16b4a49"/>
           </a:graphicData>
         </a:graphic>
       </p:graphicFrame>
       <p:graphicFrame>
         <p:nvGraphicFramePr>
-          <p:cNvPr id="10028" name="labelrotation=-30"/>
+          <p:cNvPr id="100028" name="labelrotation=-30"/>
           <p:cNvGraphicFramePr/>
           <p:nvPr/>
         </p:nvGraphicFramePr>
@@ -6238,13 +6280,13 @@
         </p:xfrm>
         <a:graphic xmlns:a="http://schemas.openxmlformats.org/drawingml/2006/main">
           <a:graphicData uri="http://schemas.openxmlformats.org/drawingml/2006/chart">
-            <c:chart xmlns:r="http://schemas.openxmlformats.org/officeDocument/2006/relationships" xmlns:c="http://schemas.openxmlformats.org/drawingml/2006/chart" r:id="R75d6d2803d584697"/>
+            <c:chart xmlns:r="http://schemas.openxmlformats.org/officeDocument/2006/relationships" xmlns:c="http://schemas.openxmlformats.org/drawingml/2006/chart" r:id="Ra2820f82b4df4e64"/>
           </a:graphicData>
         </a:graphic>
       </p:graphicFrame>
       <p:graphicFrame>
         <p:nvGraphicFramePr>
-          <p:cNvPr id="10029" name="logbase=10"/>
+          <p:cNvPr id="100029" name="logbase=10"/>
           <p:cNvGraphicFramePr/>
           <p:nvPr/>
         </p:nvGraphicFramePr>
@@ -6254,7 +6296,7 @@
         </p:xfrm>
         <a:graphic xmlns:a="http://schemas.openxmlformats.org/drawingml/2006/main">
           <a:graphicData uri="http://schemas.openxmlformats.org/drawingml/2006/chart">
-            <c:chart xmlns:r="http://schemas.openxmlformats.org/officeDocument/2006/relationships" xmlns:c="http://schemas.openxmlformats.org/drawingml/2006/chart" r:id="Rca8ac493013f4034"/>
+            <c:chart xmlns:r="http://schemas.openxmlformats.org/officeDocument/2006/relationships" xmlns:c="http://schemas.openxmlformats.org/drawingml/2006/chart" r:id="Rea814f72ec9e4b85"/>
           </a:graphicData>
         </a:graphic>
       </p:graphicFrame>
@@ -6275,8 +6317,8 @@
       <p:grpSpPr/>
       <p:sp>
         <p:nvSpPr>
-          <p:cNvPr id="10030" name="TextBox 1"/>
-          <p:cNvSpPr/>
+          <p:cNvPr id="100030" name="TextBox 1"/>
+          <p:cNvSpPr txBox="1"/>
           <p:nvPr/>
         </p:nvSpPr>
         <p:spPr>
@@ -6303,7 +6345,7 @@
       </p:sp>
       <p:graphicFrame>
         <p:nvGraphicFramePr>
-          <p:cNvPr id="10031" name="droplines + hilowlines"/>
+          <p:cNvPr id="100031" name="droplines + hilowlines"/>
           <p:cNvGraphicFramePr/>
           <p:nvPr/>
         </p:nvGraphicFramePr>
@@ -6313,13 +6355,13 @@
         </p:xfrm>
         <a:graphic xmlns:a="http://schemas.openxmlformats.org/drawingml/2006/main">
           <a:graphicData uri="http://schemas.openxmlformats.org/drawingml/2006/chart">
-            <c:chart xmlns:r="http://schemas.openxmlformats.org/officeDocument/2006/relationships" xmlns:c="http://schemas.openxmlformats.org/drawingml/2006/chart" r:id="R39915d22767e43e4"/>
+            <c:chart xmlns:r="http://schemas.openxmlformats.org/officeDocument/2006/relationships" xmlns:c="http://schemas.openxmlformats.org/drawingml/2006/chart" r:id="R19c240bc89134922"/>
           </a:graphicData>
         </a:graphic>
       </p:graphicFrame>
       <p:graphicFrame>
         <p:nvGraphicFramePr>
-          <p:cNvPr id="10032" name="updownbars=150:00AA00:FF0000"/>
+          <p:cNvPr id="100032" name="updownbars=150:00AA00:FF0000"/>
           <p:cNvGraphicFramePr/>
           <p:nvPr/>
         </p:nvGraphicFramePr>
@@ -6329,13 +6371,13 @@
         </p:xfrm>
         <a:graphic xmlns:a="http://schemas.openxmlformats.org/drawingml/2006/main">
           <a:graphicData uri="http://schemas.openxmlformats.org/drawingml/2006/chart">
-            <c:chart xmlns:r="http://schemas.openxmlformats.org/officeDocument/2006/relationships" xmlns:c="http://schemas.openxmlformats.org/drawingml/2006/chart" r:id="R737c8762a49f42bd"/>
+            <c:chart xmlns:r="http://schemas.openxmlformats.org/officeDocument/2006/relationships" xmlns:c="http://schemas.openxmlformats.org/drawingml/2006/chart" r:id="R94106e61c68e4e2b"/>
           </a:graphicData>
         </a:graphic>
       </p:graphicFrame>
       <p:graphicFrame>
         <p:nvGraphicFramePr>
-          <p:cNvPr id="10033" name="trendline=linear + errbars=stdDev:1"/>
+          <p:cNvPr id="100033" name="trendline=linear + errbars=stdDev:1"/>
           <p:cNvGraphicFramePr/>
           <p:nvPr/>
         </p:nvGraphicFramePr>
@@ -6345,13 +6387,13 @@
         </p:xfrm>
         <a:graphic xmlns:a="http://schemas.openxmlformats.org/drawingml/2006/main">
           <a:graphicData uri="http://schemas.openxmlformats.org/drawingml/2006/chart">
-            <c:chart xmlns:r="http://schemas.openxmlformats.org/officeDocument/2006/relationships" xmlns:c="http://schemas.openxmlformats.org/drawingml/2006/chart" r:id="R4dee6af525734a77"/>
+            <c:chart xmlns:r="http://schemas.openxmlformats.org/officeDocument/2006/relationships" xmlns:c="http://schemas.openxmlformats.org/drawingml/2006/chart" r:id="R34ff53d42689482d"/>
           </a:graphicData>
         </a:graphic>
       </p:graphicFrame>
       <p:graphicFrame>
         <p:nvGraphicFramePr>
-          <p:cNvPr id="10034" name="referenceline=70:FF0000:Target"/>
+          <p:cNvPr id="100034" name="referenceline=70:FF0000:Target"/>
           <p:cNvGraphicFramePr/>
           <p:nvPr/>
         </p:nvGraphicFramePr>
@@ -6361,7 +6403,7 @@
         </p:xfrm>
         <a:graphic xmlns:a="http://schemas.openxmlformats.org/drawingml/2006/main">
           <a:graphicData uri="http://schemas.openxmlformats.org/drawingml/2006/chart">
-            <c:chart xmlns:r="http://schemas.openxmlformats.org/officeDocument/2006/relationships" xmlns:c="http://schemas.openxmlformats.org/drawingml/2006/chart" r:id="R926740f4aa8148b2"/>
+            <c:chart xmlns:r="http://schemas.openxmlformats.org/officeDocument/2006/relationships" xmlns:c="http://schemas.openxmlformats.org/drawingml/2006/chart" r:id="R8c4794d5c5d947d6"/>
           </a:graphicData>
         </a:graphic>
       </p:graphicFrame>
@@ -6382,8 +6424,8 @@
       <p:grpSpPr/>
       <p:sp>
         <p:nvSpPr>
-          <p:cNvPr id="10035" name="TextBox 1"/>
-          <p:cNvSpPr/>
+          <p:cNvPr id="100035" name="TextBox 1"/>
+          <p:cNvSpPr txBox="1"/>
           <p:nvPr/>
         </p:nvSpPr>
         <p:spPr>
@@ -6410,7 +6452,7 @@
       </p:sp>
       <p:graphicFrame>
         <p:nvGraphicFramePr>
-          <p:cNvPr id="10036" name="preset=minimal"/>
+          <p:cNvPr id="100036" name="preset=minimal"/>
           <p:cNvGraphicFramePr/>
           <p:nvPr/>
         </p:nvGraphicFramePr>
@@ -6420,13 +6462,13 @@
         </p:xfrm>
         <a:graphic xmlns:a="http://schemas.openxmlformats.org/drawingml/2006/main">
           <a:graphicData uri="http://schemas.openxmlformats.org/drawingml/2006/chart">
-            <c:chart xmlns:r="http://schemas.openxmlformats.org/officeDocument/2006/relationships" xmlns:c="http://schemas.openxmlformats.org/drawingml/2006/chart" r:id="R2cdc4a8f41244c9a"/>
+            <c:chart xmlns:r="http://schemas.openxmlformats.org/officeDocument/2006/relationships" xmlns:c="http://schemas.openxmlformats.org/drawingml/2006/chart" r:id="R477c8e7f22854e24"/>
           </a:graphicData>
         </a:graphic>
       </p:graphicFrame>
       <p:graphicFrame>
         <p:nvGraphicFramePr>
-          <p:cNvPr id="10037" name="preset=dark"/>
+          <p:cNvPr id="100037" name="preset=dark"/>
           <p:cNvGraphicFramePr/>
           <p:nvPr/>
         </p:nvGraphicFramePr>
@@ -6436,13 +6478,13 @@
         </p:xfrm>
         <a:graphic xmlns:a="http://schemas.openxmlformats.org/drawingml/2006/main">
           <a:graphicData uri="http://schemas.openxmlformats.org/drawingml/2006/chart">
-            <c:chart xmlns:r="http://schemas.openxmlformats.org/officeDocument/2006/relationships" xmlns:c="http://schemas.openxmlformats.org/drawingml/2006/chart" r:id="R7e98e70464354fa0"/>
+            <c:chart xmlns:r="http://schemas.openxmlformats.org/officeDocument/2006/relationships" xmlns:c="http://schemas.openxmlformats.org/drawingml/2006/chart" r:id="R9ada457328824419"/>
           </a:graphicData>
         </a:graphic>
       </p:graphicFrame>
       <p:graphicFrame>
         <p:nvGraphicFramePr>
-          <p:cNvPr id="10038" name="preset=corporate"/>
+          <p:cNvPr id="100038" name="preset=corporate"/>
           <p:cNvGraphicFramePr/>
           <p:nvPr/>
         </p:nvGraphicFramePr>
@@ -6452,13 +6494,13 @@
         </p:xfrm>
         <a:graphic xmlns:a="http://schemas.openxmlformats.org/drawingml/2006/main">
           <a:graphicData uri="http://schemas.openxmlformats.org/drawingml/2006/chart">
-            <c:chart xmlns:r="http://schemas.openxmlformats.org/officeDocument/2006/relationships" xmlns:c="http://schemas.openxmlformats.org/drawingml/2006/chart" r:id="R25cb101e222b482a"/>
+            <c:chart xmlns:r="http://schemas.openxmlformats.org/officeDocument/2006/relationships" xmlns:c="http://schemas.openxmlformats.org/drawingml/2006/chart" r:id="Rf4971e099cb54100"/>
           </a:graphicData>
         </a:graphic>
       </p:graphicFrame>
       <p:graphicFrame>
         <p:nvGraphicFramePr>
-          <p:cNvPr id="10039" name="chart-series Set per line"/>
+          <p:cNvPr id="100039" name="chart-series Set per line"/>
           <p:cNvGraphicFramePr/>
           <p:nvPr/>
         </p:nvGraphicFramePr>
@@ -6468,7 +6510,7 @@
         </p:xfrm>
         <a:graphic xmlns:a="http://schemas.openxmlformats.org/drawingml/2006/main">
           <a:graphicData uri="http://schemas.openxmlformats.org/drawingml/2006/chart">
-            <c:chart xmlns:r="http://schemas.openxmlformats.org/officeDocument/2006/relationships" xmlns:c="http://schemas.openxmlformats.org/drawingml/2006/chart" r:id="R6d653878b31e44d7"/>
+            <c:chart xmlns:r="http://schemas.openxmlformats.org/officeDocument/2006/relationships" xmlns:c="http://schemas.openxmlformats.org/drawingml/2006/chart" r:id="R4eb359ba4a6149dc"/>
           </a:graphicData>
         </a:graphic>
       </p:graphicFrame>
